--- a/instructions/instructions1.pptx
+++ b/instructions/instructions1.pptx
@@ -243,7 +243,7 @@
           <a:p>
             <a:fld id="{56C1262A-8E22-4BE6-A8FE-00869FC64ED9}" type="datetimeFigureOut">
               <a:rPr lang="de-DE" smtClean="0"/>
-              <a:t>21.02.2024</a:t>
+              <a:t>12.03.2026</a:t>
             </a:fld>
             <a:endParaRPr lang="de-DE"/>
           </a:p>
@@ -411,7 +411,7 @@
           <a:p>
             <a:fld id="{56C1262A-8E22-4BE6-A8FE-00869FC64ED9}" type="datetimeFigureOut">
               <a:rPr lang="de-DE" smtClean="0"/>
-              <a:t>21.02.2024</a:t>
+              <a:t>12.03.2026</a:t>
             </a:fld>
             <a:endParaRPr lang="de-DE"/>
           </a:p>
@@ -589,7 +589,7 @@
           <a:p>
             <a:fld id="{56C1262A-8E22-4BE6-A8FE-00869FC64ED9}" type="datetimeFigureOut">
               <a:rPr lang="de-DE" smtClean="0"/>
-              <a:t>21.02.2024</a:t>
+              <a:t>12.03.2026</a:t>
             </a:fld>
             <a:endParaRPr lang="de-DE"/>
           </a:p>
@@ -765,7 +765,7 @@
           <a:p>
             <a:fld id="{56C1262A-8E22-4BE6-A8FE-00869FC64ED9}" type="datetimeFigureOut">
               <a:rPr lang="de-DE" smtClean="0"/>
-              <a:t>21.02.2024</a:t>
+              <a:t>12.03.2026</a:t>
             </a:fld>
             <a:endParaRPr lang="de-DE"/>
           </a:p>
@@ -1010,7 +1010,7 @@
           <a:p>
             <a:fld id="{56C1262A-8E22-4BE6-A8FE-00869FC64ED9}" type="datetimeFigureOut">
               <a:rPr lang="de-DE" smtClean="0"/>
-              <a:t>21.02.2024</a:t>
+              <a:t>12.03.2026</a:t>
             </a:fld>
             <a:endParaRPr lang="de-DE"/>
           </a:p>
@@ -1239,7 +1239,7 @@
           <a:p>
             <a:fld id="{56C1262A-8E22-4BE6-A8FE-00869FC64ED9}" type="datetimeFigureOut">
               <a:rPr lang="de-DE" smtClean="0"/>
-              <a:t>21.02.2024</a:t>
+              <a:t>12.03.2026</a:t>
             </a:fld>
             <a:endParaRPr lang="de-DE"/>
           </a:p>
@@ -1603,7 +1603,7 @@
           <a:p>
             <a:fld id="{56C1262A-8E22-4BE6-A8FE-00869FC64ED9}" type="datetimeFigureOut">
               <a:rPr lang="de-DE" smtClean="0"/>
-              <a:t>21.02.2024</a:t>
+              <a:t>12.03.2026</a:t>
             </a:fld>
             <a:endParaRPr lang="de-DE"/>
           </a:p>
@@ -1720,7 +1720,7 @@
           <a:p>
             <a:fld id="{56C1262A-8E22-4BE6-A8FE-00869FC64ED9}" type="datetimeFigureOut">
               <a:rPr lang="de-DE" smtClean="0"/>
-              <a:t>21.02.2024</a:t>
+              <a:t>12.03.2026</a:t>
             </a:fld>
             <a:endParaRPr lang="de-DE"/>
           </a:p>
@@ -1815,7 +1815,7 @@
           <a:p>
             <a:fld id="{56C1262A-8E22-4BE6-A8FE-00869FC64ED9}" type="datetimeFigureOut">
               <a:rPr lang="de-DE" smtClean="0"/>
-              <a:t>21.02.2024</a:t>
+              <a:t>12.03.2026</a:t>
             </a:fld>
             <a:endParaRPr lang="de-DE"/>
           </a:p>
@@ -2090,7 +2090,7 @@
           <a:p>
             <a:fld id="{56C1262A-8E22-4BE6-A8FE-00869FC64ED9}" type="datetimeFigureOut">
               <a:rPr lang="de-DE" smtClean="0"/>
-              <a:t>21.02.2024</a:t>
+              <a:t>12.03.2026</a:t>
             </a:fld>
             <a:endParaRPr lang="de-DE"/>
           </a:p>
@@ -2342,7 +2342,7 @@
           <a:p>
             <a:fld id="{56C1262A-8E22-4BE6-A8FE-00869FC64ED9}" type="datetimeFigureOut">
               <a:rPr lang="de-DE" smtClean="0"/>
-              <a:t>21.02.2024</a:t>
+              <a:t>12.03.2026</a:t>
             </a:fld>
             <a:endParaRPr lang="de-DE"/>
           </a:p>
@@ -2553,7 +2553,7 @@
           <a:p>
             <a:fld id="{56C1262A-8E22-4BE6-A8FE-00869FC64ED9}" type="datetimeFigureOut">
               <a:rPr lang="de-DE" smtClean="0"/>
-              <a:t>21.02.2024</a:t>
+              <a:t>12.03.2026</a:t>
             </a:fld>
             <a:endParaRPr lang="de-DE"/>
           </a:p>
@@ -3400,72 +3400,8 @@
               <a:buNone/>
             </a:pPr>
             <a:r>
-              <a:rPr lang="de-DE" sz="2400" dirty="0"/>
-              <a:t>Place </a:t>
-            </a:r>
-            <a:r>
-              <a:rPr lang="de-DE" sz="2400" dirty="0" err="1"/>
-              <a:t>the</a:t>
-            </a:r>
-            <a:r>
-              <a:rPr lang="de-DE" sz="2400" dirty="0"/>
-              <a:t> </a:t>
-            </a:r>
-            <a:r>
-              <a:rPr lang="de-DE" sz="2400" dirty="0" err="1"/>
-              <a:t>fingers</a:t>
-            </a:r>
-            <a:r>
-              <a:rPr lang="de-DE" sz="2400" dirty="0"/>
-              <a:t> </a:t>
-            </a:r>
-            <a:r>
-              <a:rPr lang="de-DE" sz="2400" dirty="0" err="1"/>
-              <a:t>of</a:t>
-            </a:r>
-            <a:r>
-              <a:rPr lang="de-DE" sz="2400" dirty="0"/>
-              <a:t> </a:t>
-            </a:r>
-            <a:r>
-              <a:rPr lang="de-DE" sz="2400" dirty="0" err="1"/>
-              <a:t>your</a:t>
-            </a:r>
-            <a:r>
-              <a:rPr lang="de-DE" sz="2400" dirty="0"/>
-              <a:t> </a:t>
-            </a:r>
-            <a:r>
-              <a:rPr lang="de-DE" sz="2400" dirty="0" err="1"/>
-              <a:t>right</a:t>
-            </a:r>
-            <a:r>
-              <a:rPr lang="de-DE" sz="2400" dirty="0"/>
-              <a:t> </a:t>
-            </a:r>
-            <a:r>
-              <a:rPr lang="de-DE" sz="2400" dirty="0" err="1"/>
-              <a:t>hand</a:t>
-            </a:r>
-            <a:r>
-              <a:rPr lang="de-DE" sz="2400" dirty="0"/>
-              <a:t> on </a:t>
-            </a:r>
-            <a:r>
-              <a:rPr lang="de-DE" sz="2400" dirty="0" err="1"/>
-              <a:t>the</a:t>
-            </a:r>
-            <a:r>
-              <a:rPr lang="de-DE" sz="2400" dirty="0"/>
-              <a:t> </a:t>
-            </a:r>
-            <a:r>
-              <a:rPr lang="de-DE" sz="2400" dirty="0" err="1"/>
-              <a:t>keys</a:t>
-            </a:r>
-            <a:r>
-              <a:rPr lang="de-DE" sz="2400" dirty="0"/>
-              <a:t> 3, 4, 5, and 6.</a:t>
+              <a:rPr lang="en-US" sz="2400" dirty="0"/>
+              <a:t>You will be shown a sequence of six words. Each word will appear on the screen individually, and the entire sequence will be presented twice.</a:t>
             </a:r>
           </a:p>
           <a:p>
@@ -3479,383 +3415,44 @@
               <a:buNone/>
             </a:pPr>
             <a:r>
-              <a:rPr lang="de-DE" sz="2400" dirty="0"/>
-              <a:t>In </a:t>
-            </a:r>
-            <a:r>
-              <a:rPr lang="de-DE" sz="2400" dirty="0" err="1"/>
-              <a:t>the</a:t>
-            </a:r>
-            <a:r>
-              <a:rPr lang="de-DE" sz="2400" dirty="0"/>
-              <a:t> </a:t>
-            </a:r>
-            <a:r>
-              <a:rPr lang="de-DE" sz="2400" dirty="0" err="1"/>
-              <a:t>experiment</a:t>
-            </a:r>
-            <a:r>
-              <a:rPr lang="de-DE" sz="2400" dirty="0"/>
-              <a:t>, </a:t>
-            </a:r>
-            <a:r>
-              <a:rPr lang="de-DE" sz="2400" dirty="0" err="1"/>
-              <a:t>we</a:t>
-            </a:r>
-            <a:r>
-              <a:rPr lang="de-DE" sz="2400" dirty="0"/>
-              <a:t> will </a:t>
-            </a:r>
-            <a:r>
-              <a:rPr lang="de-DE" sz="2400" dirty="0" err="1"/>
-              <a:t>display</a:t>
-            </a:r>
-            <a:r>
-              <a:rPr lang="de-DE" sz="2400" dirty="0"/>
-              <a:t> </a:t>
-            </a:r>
-            <a:r>
-              <a:rPr lang="de-DE" sz="2400" dirty="0" err="1"/>
-              <a:t>sets</a:t>
-            </a:r>
-            <a:r>
-              <a:rPr lang="de-DE" sz="2400" dirty="0"/>
-              <a:t> </a:t>
-            </a:r>
-            <a:r>
-              <a:rPr lang="de-DE" sz="2400" dirty="0" err="1"/>
-              <a:t>of</a:t>
-            </a:r>
-            <a:r>
-              <a:rPr lang="de-DE" sz="2400" dirty="0"/>
-              <a:t> </a:t>
-            </a:r>
-            <a:r>
-              <a:rPr lang="de-DE" sz="2400" dirty="0" err="1"/>
-              <a:t>three</a:t>
-            </a:r>
-            <a:r>
-              <a:rPr lang="de-DE" sz="2400" dirty="0"/>
-              <a:t> </a:t>
-            </a:r>
-            <a:r>
-              <a:rPr lang="de-DE" sz="2400" dirty="0" err="1"/>
-              <a:t>numbers</a:t>
-            </a:r>
-            <a:r>
-              <a:rPr lang="de-DE" sz="2400" dirty="0"/>
-              <a:t> </a:t>
-            </a:r>
-            <a:r>
-              <a:rPr lang="de-DE" sz="2400" dirty="0" err="1"/>
-              <a:t>to</a:t>
-            </a:r>
-            <a:r>
-              <a:rPr lang="de-DE" sz="2400" dirty="0"/>
-              <a:t> </a:t>
-            </a:r>
-            <a:r>
-              <a:rPr lang="de-DE" sz="2400" dirty="0" err="1"/>
-              <a:t>you</a:t>
-            </a:r>
-            <a:r>
-              <a:rPr lang="de-DE" sz="2400" dirty="0"/>
-              <a:t>. </a:t>
+              <a:rPr lang="en-US" sz="2400" dirty="0"/>
+              <a:t>Please </a:t>
+            </a:r>
+            <a:r>
+              <a:rPr lang="en-US" sz="2400" b="1" dirty="0"/>
+              <a:t>read each word aloud </a:t>
+            </a:r>
+            <a:r>
+              <a:rPr lang="en-US" sz="2400" dirty="0"/>
+              <a:t>as it appears. </a:t>
             </a:r>
           </a:p>
           <a:p>
             <a:pPr marL="0" indent="0" algn="ctr">
               <a:buNone/>
             </a:pPr>
-            <a:r>
-              <a:rPr lang="de-DE" sz="2400" dirty="0" err="1"/>
-              <a:t>It</a:t>
-            </a:r>
-            <a:r>
-              <a:rPr lang="de-DE" sz="2400" dirty="0"/>
-              <a:t> </a:t>
-            </a:r>
-            <a:r>
-              <a:rPr lang="de-DE" sz="2400" dirty="0" err="1"/>
-              <a:t>is</a:t>
-            </a:r>
-            <a:r>
-              <a:rPr lang="de-DE" sz="2400" dirty="0"/>
-              <a:t> </a:t>
-            </a:r>
-            <a:r>
-              <a:rPr lang="de-DE" sz="2400" dirty="0" err="1"/>
-              <a:t>your</a:t>
-            </a:r>
-            <a:r>
-              <a:rPr lang="de-DE" sz="2400" dirty="0"/>
-              <a:t> </a:t>
-            </a:r>
-            <a:r>
-              <a:rPr lang="de-DE" sz="2400" dirty="0" err="1"/>
-              <a:t>task</a:t>
-            </a:r>
-            <a:r>
-              <a:rPr lang="de-DE" sz="2400" dirty="0"/>
-              <a:t> </a:t>
-            </a:r>
-            <a:r>
-              <a:rPr lang="de-DE" sz="2400" dirty="0" err="1"/>
-              <a:t>to</a:t>
-            </a:r>
-            <a:r>
-              <a:rPr lang="de-DE" sz="2400" dirty="0"/>
-              <a:t> </a:t>
-            </a:r>
-            <a:r>
-              <a:rPr lang="de-DE" sz="2400" dirty="0" err="1"/>
-              <a:t>react</a:t>
-            </a:r>
-            <a:r>
-              <a:rPr lang="de-DE" sz="2400" dirty="0"/>
-              <a:t> </a:t>
-            </a:r>
-            <a:r>
-              <a:rPr lang="de-DE" sz="2400" dirty="0" err="1"/>
-              <a:t>to</a:t>
-            </a:r>
-            <a:r>
-              <a:rPr lang="de-DE" sz="2400" dirty="0"/>
-              <a:t> </a:t>
-            </a:r>
-            <a:r>
-              <a:rPr lang="de-DE" sz="2400" dirty="0" err="1"/>
-              <a:t>the</a:t>
-            </a:r>
-            <a:r>
-              <a:rPr lang="de-DE" sz="2400" dirty="0"/>
-              <a:t> </a:t>
-            </a:r>
-            <a:r>
-              <a:rPr lang="de-DE" sz="2400" dirty="0" err="1"/>
-              <a:t>central</a:t>
-            </a:r>
-            <a:r>
-              <a:rPr lang="de-DE" sz="2400" dirty="0"/>
-              <a:t> </a:t>
-            </a:r>
-            <a:r>
-              <a:rPr lang="de-DE" sz="2400" dirty="0" err="1"/>
-              <a:t>number</a:t>
-            </a:r>
-            <a:r>
-              <a:rPr lang="de-DE" sz="2400" dirty="0"/>
-              <a:t> </a:t>
-            </a:r>
-            <a:r>
-              <a:rPr lang="de-DE" sz="2400" dirty="0" err="1"/>
-              <a:t>by</a:t>
-            </a:r>
-            <a:r>
-              <a:rPr lang="de-DE" sz="2400" dirty="0"/>
-              <a:t> </a:t>
-            </a:r>
-            <a:r>
-              <a:rPr lang="de-DE" sz="2400" dirty="0" err="1"/>
-              <a:t>pressing</a:t>
-            </a:r>
-            <a:r>
-              <a:rPr lang="de-DE" sz="2400" dirty="0"/>
-              <a:t> </a:t>
-            </a:r>
-            <a:r>
-              <a:rPr lang="de-DE" sz="2400" dirty="0" err="1"/>
-              <a:t>the</a:t>
-            </a:r>
-            <a:r>
-              <a:rPr lang="de-DE" sz="2400" dirty="0"/>
-              <a:t> </a:t>
-            </a:r>
-            <a:r>
-              <a:rPr lang="de-DE" sz="2400" dirty="0" err="1"/>
-              <a:t>matching</a:t>
-            </a:r>
-            <a:r>
-              <a:rPr lang="de-DE" sz="2400" dirty="0"/>
-              <a:t> </a:t>
-            </a:r>
-            <a:r>
-              <a:rPr lang="de-DE" sz="2400" dirty="0" err="1"/>
-              <a:t>key</a:t>
-            </a:r>
-            <a:r>
-              <a:rPr lang="de-DE" sz="2400" dirty="0"/>
-              <a:t>: </a:t>
-            </a:r>
-            <a:r>
-              <a:rPr lang="de-DE" sz="2400" dirty="0" err="1"/>
-              <a:t>If</a:t>
-            </a:r>
-            <a:r>
-              <a:rPr lang="de-DE" sz="2400" dirty="0"/>
-              <a:t> </a:t>
-            </a:r>
-            <a:r>
-              <a:rPr lang="de-DE" sz="2400" dirty="0" err="1"/>
-              <a:t>you</a:t>
-            </a:r>
-            <a:r>
-              <a:rPr lang="de-DE" sz="2400" dirty="0"/>
-              <a:t> </a:t>
-            </a:r>
-            <a:r>
-              <a:rPr lang="de-DE" sz="2400" dirty="0" err="1"/>
-              <a:t>see</a:t>
-            </a:r>
-            <a:r>
-              <a:rPr lang="de-DE" sz="2400" dirty="0"/>
-              <a:t> </a:t>
-            </a:r>
-            <a:r>
-              <a:rPr lang="de-DE" sz="2400" dirty="0" err="1"/>
-              <a:t>the</a:t>
-            </a:r>
-            <a:r>
-              <a:rPr lang="de-DE" sz="2400" dirty="0"/>
-              <a:t> </a:t>
-            </a:r>
-            <a:r>
-              <a:rPr lang="de-DE" sz="2400" dirty="0" err="1"/>
-              <a:t>number</a:t>
-            </a:r>
-            <a:r>
-              <a:rPr lang="de-DE" sz="2400" dirty="0"/>
-              <a:t> 4, </a:t>
-            </a:r>
-            <a:r>
-              <a:rPr lang="de-DE" sz="2400" dirty="0" err="1"/>
-              <a:t>you</a:t>
-            </a:r>
-            <a:r>
-              <a:rPr lang="de-DE" sz="2400" dirty="0"/>
-              <a:t> </a:t>
-            </a:r>
-            <a:r>
-              <a:rPr lang="de-DE" sz="2400" dirty="0" err="1"/>
-              <a:t>must</a:t>
-            </a:r>
-            <a:r>
-              <a:rPr lang="de-DE" sz="2400" dirty="0"/>
-              <a:t> press </a:t>
-            </a:r>
-            <a:r>
-              <a:rPr lang="de-DE" sz="2400" dirty="0" err="1"/>
-              <a:t>the</a:t>
-            </a:r>
-            <a:r>
-              <a:rPr lang="de-DE" sz="2400" dirty="0"/>
-              <a:t> </a:t>
-            </a:r>
-            <a:r>
-              <a:rPr lang="de-DE" sz="2400" dirty="0" err="1"/>
-              <a:t>key</a:t>
-            </a:r>
-            <a:r>
-              <a:rPr lang="de-DE" sz="2400" dirty="0"/>
-              <a:t> 4.</a:t>
-            </a:r>
+            <a:endParaRPr lang="en-US" sz="2400" dirty="0"/>
           </a:p>
           <a:p>
             <a:pPr marL="0" indent="0" algn="ctr">
               <a:buNone/>
             </a:pPr>
             <a:r>
-              <a:rPr lang="de-DE" sz="2400" dirty="0"/>
-              <a:t>The </a:t>
-            </a:r>
-            <a:r>
-              <a:rPr lang="de-DE" sz="2400" dirty="0" err="1"/>
-              <a:t>outer</a:t>
-            </a:r>
-            <a:r>
-              <a:rPr lang="de-DE" sz="2400" dirty="0"/>
-              <a:t> </a:t>
-            </a:r>
-            <a:r>
-              <a:rPr lang="de-DE" sz="2400" dirty="0" err="1"/>
-              <a:t>numbers</a:t>
-            </a:r>
-            <a:r>
-              <a:rPr lang="de-DE" sz="2400" dirty="0"/>
-              <a:t> </a:t>
-            </a:r>
-            <a:r>
-              <a:rPr lang="de-DE" sz="2400" dirty="0" err="1"/>
-              <a:t>can</a:t>
-            </a:r>
-            <a:r>
-              <a:rPr lang="de-DE" sz="2400" dirty="0"/>
-              <a:t> </a:t>
-            </a:r>
-            <a:r>
-              <a:rPr lang="de-DE" sz="2400" dirty="0" err="1"/>
-              <a:t>be</a:t>
-            </a:r>
-            <a:r>
-              <a:rPr lang="de-DE" sz="2400" dirty="0"/>
-              <a:t> </a:t>
-            </a:r>
-            <a:r>
-              <a:rPr lang="de-DE" sz="2400" dirty="0" err="1"/>
-              <a:t>ignored</a:t>
-            </a:r>
-            <a:r>
-              <a:rPr lang="de-DE" sz="2400" dirty="0"/>
-              <a:t>. Be </a:t>
-            </a:r>
-            <a:r>
-              <a:rPr lang="de-DE" sz="2400" dirty="0" err="1"/>
-              <a:t>careful</a:t>
-            </a:r>
-            <a:r>
-              <a:rPr lang="de-DE" sz="2400" dirty="0"/>
-              <a:t>, </a:t>
-            </a:r>
-            <a:r>
-              <a:rPr lang="de-DE" sz="2400" dirty="0" err="1"/>
-              <a:t>they</a:t>
-            </a:r>
-            <a:r>
-              <a:rPr lang="de-DE" sz="2400" dirty="0"/>
-              <a:t> </a:t>
-            </a:r>
-            <a:r>
-              <a:rPr lang="de-DE" sz="2400" dirty="0" err="1"/>
-              <a:t>appear</a:t>
-            </a:r>
-            <a:r>
-              <a:rPr lang="de-DE" sz="2400" dirty="0"/>
-              <a:t> </a:t>
-            </a:r>
-            <a:r>
-              <a:rPr lang="de-DE" sz="2400" dirty="0" err="1"/>
-              <a:t>with</a:t>
-            </a:r>
-            <a:r>
-              <a:rPr lang="de-DE" sz="2400" dirty="0"/>
-              <a:t> a </a:t>
-            </a:r>
-            <a:r>
-              <a:rPr lang="de-DE" sz="2400" dirty="0" err="1"/>
-              <a:t>little</a:t>
-            </a:r>
-            <a:r>
-              <a:rPr lang="de-DE" sz="2400" dirty="0"/>
-              <a:t> </a:t>
-            </a:r>
-            <a:r>
-              <a:rPr lang="de-DE" sz="2400" dirty="0" err="1"/>
-              <a:t>headstart</a:t>
-            </a:r>
-            <a:r>
-              <a:rPr lang="de-DE" sz="2400" dirty="0"/>
-              <a:t>.</a:t>
-            </a:r>
+              <a:rPr lang="en-US" sz="2400" dirty="0"/>
+              <a:t>After the sequence has been shown two times, you will be asked to </a:t>
+            </a:r>
+            <a:br>
+              <a:rPr lang="en-US" sz="2400" dirty="0"/>
+            </a:br>
+            <a:r>
+              <a:rPr lang="en-US" sz="2400" b="1" dirty="0"/>
+              <a:t>recall the words in the same order</a:t>
+            </a:r>
+            <a:r>
+              <a:rPr lang="en-US" sz="2400" dirty="0"/>
+              <a:t> in which they were presented.</a:t>
+            </a:r>
+            <a:endParaRPr lang="de-DE" sz="2400" dirty="0"/>
           </a:p>
           <a:p>
             <a:pPr marL="0" indent="0" algn="ctr">
@@ -3867,6 +3464,18 @@
             <a:pPr marL="0" indent="0" algn="ctr">
               <a:buNone/>
             </a:pPr>
+            <a:r>
+              <a:rPr lang="en-US" sz="2400" dirty="0"/>
+              <a:t>If you cannot remember a word at a certain position, please say </a:t>
+            </a:r>
+            <a:r>
+              <a:rPr lang="en-US" sz="2400" b="1" dirty="0"/>
+              <a:t>“blank”</a:t>
+            </a:r>
+            <a:r>
+              <a:rPr lang="en-US" sz="2400" dirty="0"/>
+              <a:t> and continue with the next position.</a:t>
+            </a:r>
             <a:endParaRPr lang="de-DE" sz="2400" dirty="0"/>
           </a:p>
         </p:txBody>
@@ -4061,126 +3670,18 @@
               <a:buNone/>
             </a:pPr>
             <a:r>
-              <a:rPr lang="de-DE" sz="2400" dirty="0" err="1"/>
-              <a:t>Before</a:t>
-            </a:r>
-            <a:r>
-              <a:rPr lang="de-DE" sz="2400" dirty="0"/>
-              <a:t> </a:t>
-            </a:r>
-            <a:r>
-              <a:rPr lang="de-DE" sz="2400" dirty="0" err="1"/>
-              <a:t>the</a:t>
-            </a:r>
-            <a:r>
-              <a:rPr lang="de-DE" sz="2400" dirty="0"/>
-              <a:t> </a:t>
-            </a:r>
-            <a:r>
-              <a:rPr lang="de-DE" sz="2400" dirty="0" err="1"/>
-              <a:t>numbers</a:t>
-            </a:r>
-            <a:r>
-              <a:rPr lang="de-DE" sz="2400" dirty="0"/>
-              <a:t> </a:t>
-            </a:r>
-            <a:r>
-              <a:rPr lang="de-DE" sz="2400" dirty="0" err="1"/>
-              <a:t>are</a:t>
-            </a:r>
-            <a:r>
-              <a:rPr lang="de-DE" sz="2400" dirty="0"/>
-              <a:t> </a:t>
-            </a:r>
-            <a:r>
-              <a:rPr lang="de-DE" sz="2400" dirty="0" err="1"/>
-              <a:t>displayed</a:t>
-            </a:r>
-            <a:r>
-              <a:rPr lang="de-DE" sz="2400" dirty="0"/>
-              <a:t>, a </a:t>
-            </a:r>
-            <a:r>
-              <a:rPr lang="de-DE" sz="2400" dirty="0" err="1"/>
-              <a:t>fixation</a:t>
-            </a:r>
-            <a:r>
-              <a:rPr lang="de-DE" sz="2400" dirty="0"/>
-              <a:t> </a:t>
-            </a:r>
-            <a:r>
-              <a:rPr lang="de-DE" sz="2400" dirty="0" err="1"/>
-              <a:t>cross</a:t>
-            </a:r>
-            <a:r>
-              <a:rPr lang="de-DE" sz="2400" dirty="0"/>
-              <a:t> will </a:t>
-            </a:r>
-            <a:r>
-              <a:rPr lang="de-DE" sz="2400" dirty="0" err="1"/>
-              <a:t>be</a:t>
-            </a:r>
-            <a:r>
-              <a:rPr lang="de-DE" sz="2400" dirty="0"/>
-              <a:t> </a:t>
-            </a:r>
-            <a:r>
-              <a:rPr lang="de-DE" sz="2400" dirty="0" err="1"/>
-              <a:t>displayed</a:t>
-            </a:r>
-            <a:r>
-              <a:rPr lang="de-DE" sz="2400" dirty="0"/>
-              <a:t>.</a:t>
-            </a:r>
-          </a:p>
-          <a:p>
-            <a:pPr marL="0" indent="0" algn="ctr">
-              <a:buNone/>
-            </a:pPr>
-            <a:r>
-              <a:rPr lang="de-DE" sz="2400" dirty="0"/>
-              <a:t>Look </a:t>
-            </a:r>
-            <a:r>
-              <a:rPr lang="de-DE" sz="2400" dirty="0" err="1"/>
-              <a:t>right</a:t>
-            </a:r>
-            <a:r>
-              <a:rPr lang="de-DE" sz="2400" dirty="0"/>
-              <a:t> at </a:t>
-            </a:r>
-            <a:r>
-              <a:rPr lang="de-DE" sz="2400" dirty="0" err="1"/>
-              <a:t>it</a:t>
-            </a:r>
-            <a:r>
-              <a:rPr lang="de-DE" sz="2400" dirty="0"/>
-              <a:t> </a:t>
-            </a:r>
-            <a:r>
-              <a:rPr lang="de-DE" sz="2400" dirty="0" err="1"/>
-              <a:t>to</a:t>
-            </a:r>
-            <a:r>
-              <a:rPr lang="de-DE" sz="2400" dirty="0"/>
-              <a:t> </a:t>
-            </a:r>
-            <a:r>
-              <a:rPr lang="de-DE" sz="2400" dirty="0" err="1"/>
-              <a:t>be</a:t>
-            </a:r>
-            <a:r>
-              <a:rPr lang="de-DE" sz="2400" dirty="0"/>
-              <a:t> </a:t>
-            </a:r>
-            <a:r>
-              <a:rPr lang="de-DE" sz="2400" dirty="0" err="1"/>
-              <a:t>ready</a:t>
-            </a:r>
-            <a:r>
-              <a:rPr lang="de-DE" sz="2400" dirty="0"/>
-              <a:t>!</a:t>
-            </a:r>
+              <a:rPr lang="en-US" sz="2400" dirty="0"/>
+              <a:t>The start of each trial is </a:t>
+            </a:r>
+            <a:r>
+              <a:rPr lang="en-US" sz="2400" b="1" dirty="0"/>
+              <a:t>self-paced</a:t>
+            </a:r>
+            <a:r>
+              <a:rPr lang="en-US" sz="2400" dirty="0"/>
+              <a:t>, meaning you decide when the trial begins.</a:t>
+            </a:r>
+            <a:endParaRPr lang="de-DE" sz="2400" dirty="0"/>
           </a:p>
           <a:p>
             <a:pPr marL="0" indent="0" algn="ctr">
@@ -4192,159 +3693,17 @@
             <a:pPr marL="0" indent="0" algn="ctr">
               <a:buNone/>
             </a:pPr>
-            <a:endParaRPr lang="de-DE" sz="2400" dirty="0"/>
-          </a:p>
-          <a:p>
-            <a:pPr marL="0" indent="0" algn="ctr">
-              <a:buNone/>
-            </a:pPr>
-            <a:r>
-              <a:rPr lang="de-DE" sz="2400" dirty="0"/>
-              <a:t>In </a:t>
-            </a:r>
-            <a:r>
-              <a:rPr lang="de-DE" sz="2400" dirty="0" err="1"/>
-              <a:t>the</a:t>
-            </a:r>
-            <a:r>
-              <a:rPr lang="de-DE" sz="2400" dirty="0"/>
-              <a:t> </a:t>
-            </a:r>
-            <a:r>
-              <a:rPr lang="de-DE" sz="2400" dirty="0" err="1"/>
-              <a:t>following</a:t>
-            </a:r>
-            <a:r>
-              <a:rPr lang="de-DE" sz="2400" dirty="0"/>
-              <a:t>, </a:t>
-            </a:r>
-            <a:r>
-              <a:rPr lang="de-DE" sz="2400" dirty="0" err="1"/>
-              <a:t>you</a:t>
-            </a:r>
-            <a:r>
-              <a:rPr lang="de-DE" sz="2400" dirty="0"/>
-              <a:t> will </a:t>
-            </a:r>
-            <a:r>
-              <a:rPr lang="de-DE" sz="2400" dirty="0" err="1"/>
-              <a:t>train</a:t>
-            </a:r>
-            <a:r>
-              <a:rPr lang="de-DE" sz="2400" dirty="0"/>
-              <a:t> </a:t>
-            </a:r>
-            <a:r>
-              <a:rPr lang="de-DE" sz="2400" dirty="0" err="1"/>
-              <a:t>the</a:t>
-            </a:r>
-            <a:r>
-              <a:rPr lang="de-DE" sz="2400" dirty="0"/>
-              <a:t> </a:t>
-            </a:r>
-            <a:r>
-              <a:rPr lang="de-DE" sz="2400" dirty="0" err="1"/>
-              <a:t>task</a:t>
-            </a:r>
-            <a:r>
-              <a:rPr lang="de-DE" sz="2400" dirty="0"/>
-              <a:t>. </a:t>
-            </a:r>
-            <a:r>
-              <a:rPr lang="de-DE" sz="2400" dirty="0" err="1"/>
-              <a:t>You</a:t>
-            </a:r>
-            <a:r>
-              <a:rPr lang="de-DE" sz="2400" dirty="0"/>
-              <a:t> will </a:t>
-            </a:r>
-            <a:r>
-              <a:rPr lang="de-DE" sz="2400" dirty="0" err="1"/>
-              <a:t>receive</a:t>
-            </a:r>
-            <a:r>
-              <a:rPr lang="de-DE" sz="2400" dirty="0"/>
-              <a:t> </a:t>
-            </a:r>
-            <a:r>
-              <a:rPr lang="de-DE" sz="2400" dirty="0" err="1"/>
-              <a:t>feedback</a:t>
-            </a:r>
-            <a:r>
-              <a:rPr lang="de-DE" sz="2400" dirty="0"/>
-              <a:t> on </a:t>
-            </a:r>
-            <a:r>
-              <a:rPr lang="de-DE" sz="2400" dirty="0" err="1"/>
-              <a:t>whether</a:t>
-            </a:r>
-            <a:r>
-              <a:rPr lang="de-DE" sz="2400" dirty="0"/>
-              <a:t> </a:t>
-            </a:r>
-            <a:r>
-              <a:rPr lang="de-DE" sz="2400" dirty="0" err="1"/>
-              <a:t>you</a:t>
-            </a:r>
-            <a:r>
-              <a:rPr lang="de-DE" sz="2400" dirty="0"/>
-              <a:t> </a:t>
-            </a:r>
-            <a:r>
-              <a:rPr lang="de-DE" sz="2400" dirty="0" err="1"/>
-              <a:t>have</a:t>
-            </a:r>
-            <a:r>
-              <a:rPr lang="de-DE" sz="2400" dirty="0"/>
-              <a:t> </a:t>
-            </a:r>
-            <a:r>
-              <a:rPr lang="de-DE" sz="2400" dirty="0" err="1"/>
-              <a:t>reacted</a:t>
-            </a:r>
-            <a:r>
-              <a:rPr lang="de-DE" sz="2400" dirty="0"/>
-              <a:t> </a:t>
-            </a:r>
-            <a:r>
-              <a:rPr lang="de-DE" sz="2400" dirty="0" err="1"/>
-              <a:t>correctly</a:t>
-            </a:r>
-            <a:r>
-              <a:rPr lang="de-DE" sz="2400" dirty="0"/>
-              <a:t> </a:t>
-            </a:r>
-            <a:r>
-              <a:rPr lang="de-DE" sz="2400" dirty="0" err="1"/>
-              <a:t>to</a:t>
-            </a:r>
-            <a:r>
-              <a:rPr lang="de-DE" sz="2400" dirty="0"/>
-              <a:t> </a:t>
-            </a:r>
-            <a:r>
-              <a:rPr lang="de-DE" sz="2400" dirty="0" err="1"/>
-              <a:t>the</a:t>
-            </a:r>
-            <a:r>
-              <a:rPr lang="de-DE" sz="2400" dirty="0"/>
-              <a:t> </a:t>
-            </a:r>
-            <a:r>
-              <a:rPr lang="de-DE" sz="2400" dirty="0" err="1"/>
-              <a:t>central</a:t>
-            </a:r>
-            <a:r>
-              <a:rPr lang="de-DE" sz="2400" dirty="0"/>
-              <a:t> </a:t>
-            </a:r>
-            <a:r>
-              <a:rPr lang="de-DE" sz="2400" dirty="0" err="1"/>
-              <a:t>number</a:t>
-            </a:r>
-            <a:r>
-              <a:rPr lang="de-DE" sz="2400" dirty="0"/>
-              <a:t>! </a:t>
+            <a:r>
+              <a:rPr lang="en-US" sz="2400" dirty="0"/>
+              <a:t>Before the first word appears, a </a:t>
+            </a:r>
+            <a:r>
+              <a:rPr lang="en-US" sz="2400" b="1" dirty="0"/>
+              <a:t>fixation cross (+)</a:t>
+            </a:r>
+            <a:r>
+              <a:rPr lang="en-US" sz="2400" dirty="0"/>
+              <a:t> will be displayed to indicate the position where the words will appear.</a:t>
             </a:r>
           </a:p>
           <a:p>
@@ -4358,79 +3717,40 @@
               <a:buNone/>
             </a:pPr>
             <a:r>
-              <a:rPr lang="de-DE" sz="2400" dirty="0" err="1"/>
-              <a:t>Please</a:t>
-            </a:r>
-            <a:r>
-              <a:rPr lang="de-DE" sz="2400" dirty="0"/>
-              <a:t> </a:t>
-            </a:r>
-            <a:r>
-              <a:rPr lang="de-DE" sz="2400" dirty="0" err="1"/>
-              <a:t>react</a:t>
-            </a:r>
-            <a:r>
-              <a:rPr lang="de-DE" sz="2400" dirty="0"/>
-              <a:t> </a:t>
-            </a:r>
-            <a:r>
-              <a:rPr lang="de-DE" sz="2400" dirty="0" err="1"/>
-              <a:t>as</a:t>
-            </a:r>
-            <a:r>
-              <a:rPr lang="de-DE" sz="2400" dirty="0"/>
-              <a:t> fast and </a:t>
-            </a:r>
-            <a:r>
-              <a:rPr lang="de-DE" sz="2400" dirty="0" err="1"/>
-              <a:t>accurate</a:t>
-            </a:r>
-            <a:r>
-              <a:rPr lang="de-DE" sz="2400" dirty="0"/>
-              <a:t> </a:t>
-            </a:r>
-            <a:r>
-              <a:rPr lang="de-DE" sz="2400" dirty="0" err="1"/>
-              <a:t>as</a:t>
-            </a:r>
-            <a:r>
-              <a:rPr lang="de-DE" sz="2400" dirty="0"/>
-              <a:t> possible </a:t>
-            </a:r>
-            <a:r>
-              <a:rPr lang="de-DE" sz="2400" dirty="0" err="1"/>
-              <a:t>to</a:t>
-            </a:r>
-            <a:r>
-              <a:rPr lang="de-DE" sz="2400" dirty="0"/>
-              <a:t> </a:t>
-            </a:r>
-            <a:r>
-              <a:rPr lang="de-DE" sz="2400" dirty="0" err="1"/>
-              <a:t>the</a:t>
-            </a:r>
-            <a:r>
-              <a:rPr lang="de-DE" sz="2400" dirty="0"/>
-              <a:t> </a:t>
-            </a:r>
-            <a:r>
-              <a:rPr lang="de-DE" sz="2400" dirty="0" err="1"/>
-              <a:t>central</a:t>
-            </a:r>
-            <a:r>
-              <a:rPr lang="de-DE" sz="2400" dirty="0"/>
-              <a:t> </a:t>
-            </a:r>
-            <a:r>
-              <a:rPr lang="de-DE" sz="2400"/>
-              <a:t>number! </a:t>
-            </a:r>
-            <a:endParaRPr lang="de-DE" sz="2400" dirty="0"/>
+              <a:rPr lang="en-US" sz="2400" dirty="0"/>
+              <a:t>Next, you will complete </a:t>
+            </a:r>
+            <a:r>
+              <a:rPr lang="en-US" sz="2400" b="1" dirty="0"/>
+              <a:t>one training trial</a:t>
+            </a:r>
+            <a:r>
+              <a:rPr lang="en-US" sz="2400" dirty="0"/>
+              <a:t> to familiarize yourself with the procedure.</a:t>
+            </a:r>
           </a:p>
           <a:p>
             <a:pPr marL="0" indent="0" algn="ctr">
               <a:buNone/>
             </a:pPr>
+            <a:endParaRPr lang="en-US" sz="2400" dirty="0"/>
+          </a:p>
+          <a:p>
+            <a:pPr marL="0" indent="0" algn="ctr">
+              <a:buNone/>
+            </a:pPr>
+            <a:r>
+              <a:rPr lang="en-US" sz="2400" dirty="0"/>
+              <a:t>After the training trial, the </a:t>
+            </a:r>
+            <a:r>
+              <a:rPr lang="en-US" sz="2400" b="1" dirty="0"/>
+              <a:t>actual experiment</a:t>
+            </a:r>
+            <a:r>
+              <a:rPr lang="en-US" sz="2400" dirty="0"/>
+              <a:t> will begin.</a:t>
+            </a:r>
             <a:endParaRPr lang="de-DE" sz="2400" dirty="0"/>
           </a:p>
         </p:txBody>
